--- a/docs/Busca Profundidade e Largura.pptx
+++ b/docs/Busca Profundidade e Largura.pptx
@@ -121,6 +121,11 @@
       </a:defRPr>
     </a:lvl9pPr>
   </p:defaultTextStyle>
+  <p:extLst>
+    <p:ext uri="{EFAFB233-063F-42B5-8137-9DF3F51BA10A}">
+      <p15:sldGuideLst xmlns:p15="http://schemas.microsoft.com/office/powerpoint/2012/main"/>
+    </p:ext>
+  </p:extLst>
 </p:presentation>
 </file>
 
@@ -10254,7 +10259,7 @@
               </a:defRPr>
             </a:pPr>
             <a:r>
-              <a:rPr sz="2700" b="1">
+              <a:rPr sz="2700" b="1" dirty="0">
                 <a:solidFill>
                   <a:srgbClr val="17242B"/>
                 </a:solidFill>
@@ -10262,8 +10267,27 @@
                 <a:ea typeface="Arial"/>
                 <a:cs typeface="Arial"/>
               </a:rPr>
-              <a:t>DFS: uma rota em profundidade</a:t>
-            </a:r>
+              <a:t>DFS: </a:t>
+            </a:r>
+            <a:r>
+              <a:rPr lang="pt-BR" sz="2700" b="1" dirty="0">
+                <a:solidFill>
+                  <a:srgbClr val="17242B"/>
+                </a:solidFill>
+                <a:latin typeface="Arial"/>
+                <a:ea typeface="Arial"/>
+                <a:cs typeface="Arial"/>
+              </a:rPr>
+              <a:t>Busca em Profundidade</a:t>
+            </a:r>
+            <a:endParaRPr sz="2700" b="1" dirty="0">
+              <a:solidFill>
+                <a:srgbClr val="17242B"/>
+              </a:solidFill>
+              <a:latin typeface="Arial"/>
+              <a:ea typeface="Arial"/>
+              <a:cs typeface="Arial"/>
+            </a:endParaRPr>
           </a:p>
         </p:txBody>
       </p:sp>
@@ -11968,6 +11992,122 @@
       </p:sp>
       <p:sp>
         <p:nvSpPr>
+          <p:cNvPr id="45" name="Explicação 4.1">
+            <a:extLst>
+              <a:ext uri="{FF2B5EF4-FFF2-40B4-BE49-F238E27FC236}">
+                <a16:creationId xmlns:a16="http://schemas.microsoft.com/office/drawing/2014/main" id="{048B26CD-6207-46EF-9D42-F43AC75073C4}"/>
+              </a:ext>
+            </a:extLst>
+          </p:cNvPr>
+          <p:cNvSpPr>
+            <a:spLocks noGrp="1"/>
+          </p:cNvSpPr>
+          <p:nvPr/>
+        </p:nvSpPr>
+        <p:spPr>
+          <a:xfrm>
+            <a:off x="6096000" y="4495800"/>
+            <a:ext cx="5095875" cy="266700"/>
+          </a:xfrm>
+          <a:prstGeom prst="rect">
+            <a:avLst/>
+          </a:prstGeom>
+          <a:noFill/>
+          <a:ln w="0">
+            <a:noFill/>
+            <a:prstDash val="solid"/>
+          </a:ln>
+        </p:spPr>
+        <p:txBody>
+          <a:bodyPr wrap="square" lIns="0" tIns="0" rIns="0" bIns="0" anchor="ctr">
+            <a:normAutofit/>
+          </a:bodyPr>
+          <a:lstStyle/>
+          <a:p>
+            <a:pPr algn="l">
+              <a:defRPr sz="1650" b="0">
+                <a:solidFill>
+                  <a:srgbClr val="5E6A70"/>
+                </a:solidFill>
+                <a:latin typeface="Arial"/>
+                <a:ea typeface="Arial"/>
+                <a:cs typeface="Arial"/>
+              </a:defRPr>
+            </a:pPr>
+            <a:r>
+              <a:rPr sz="1650" b="0">
+                <a:solidFill>
+                  <a:srgbClr val="5E6A70"/>
+                </a:solidFill>
+                <a:latin typeface="Arial"/>
+                <a:ea typeface="Arial"/>
+                <a:cs typeface="Arial"/>
+              </a:rPr>
+              <a:t>Segue um ramo até não poder avançar.</a:t>
+            </a:r>
+          </a:p>
+        </p:txBody>
+      </p:sp>
+      <p:sp>
+        <p:nvSpPr>
+          <p:cNvPr id="46" name="Explicação 4.2">
+            <a:extLst>
+              <a:ext uri="{FF2B5EF4-FFF2-40B4-BE49-F238E27FC236}">
+                <a16:creationId xmlns:a16="http://schemas.microsoft.com/office/drawing/2014/main" id="{0244A997-1FB8-4F43-AB6A-DB6CE6A8E1AD}"/>
+              </a:ext>
+            </a:extLst>
+          </p:cNvPr>
+          <p:cNvSpPr>
+            <a:spLocks noGrp="1"/>
+          </p:cNvSpPr>
+          <p:nvPr/>
+        </p:nvSpPr>
+        <p:spPr>
+          <a:xfrm>
+            <a:off x="6096000" y="4791075"/>
+            <a:ext cx="5095875" cy="266700"/>
+          </a:xfrm>
+          <a:prstGeom prst="rect">
+            <a:avLst/>
+          </a:prstGeom>
+          <a:noFill/>
+          <a:ln w="0">
+            <a:noFill/>
+            <a:prstDash val="solid"/>
+          </a:ln>
+        </p:spPr>
+        <p:txBody>
+          <a:bodyPr wrap="square" lIns="0" tIns="0" rIns="0" bIns="0" anchor="ctr">
+            <a:normAutofit/>
+          </a:bodyPr>
+          <a:lstStyle/>
+          <a:p>
+            <a:pPr algn="l">
+              <a:defRPr sz="1650" b="0">
+                <a:solidFill>
+                  <a:srgbClr val="5E6A70"/>
+                </a:solidFill>
+                <a:latin typeface="Arial"/>
+                <a:ea typeface="Arial"/>
+                <a:cs typeface="Arial"/>
+              </a:defRPr>
+            </a:pPr>
+            <a:r>
+              <a:rPr sz="1650" b="0">
+                <a:solidFill>
+                  <a:srgbClr val="5E6A70"/>
+                </a:solidFill>
+                <a:latin typeface="Arial"/>
+                <a:ea typeface="Arial"/>
+                <a:cs typeface="Arial"/>
+              </a:rPr>
+              <a:t>Se trava, volta à última bifurcação.</a:t>
+            </a:r>
+          </a:p>
+        </p:txBody>
+      </p:sp>
+      <p:sp>
+        <p:nvSpPr>
           <p:cNvPr id="43" name="Retângulo 42">
             <a:extLst>
               <a:ext uri="{FF2B5EF4-FFF2-40B4-BE49-F238E27FC236}">
@@ -11982,7 +12122,7 @@
         </p:nvSpPr>
         <p:spPr>
           <a:xfrm>
-            <a:off x="6096000" y="4981575"/>
+            <a:off x="6096000" y="5334000"/>
             <a:ext cx="4953000" cy="666750"/>
           </a:xfrm>
           <a:prstGeom prst="rect">
@@ -12107,7 +12247,7 @@
               </a:defRPr>
             </a:pPr>
             <a:r>
-              <a:rPr sz="2700" b="1">
+              <a:rPr sz="2700" b="1" dirty="0">
                 <a:solidFill>
                   <a:srgbClr val="17242B"/>
                 </a:solidFill>
@@ -12115,8 +12255,82 @@
                 <a:ea typeface="Arial"/>
                 <a:cs typeface="Arial"/>
               </a:rPr>
-              <a:t>BFS: expansão por níveis</a:t>
-            </a:r>
+              <a:t>BFS: </a:t>
+            </a:r>
+            <a:r>
+              <a:rPr lang="pt-BR" sz="2700" b="1" dirty="0">
+                <a:solidFill>
+                  <a:srgbClr val="17242B"/>
+                </a:solidFill>
+                <a:latin typeface="Arial"/>
+                <a:ea typeface="Arial"/>
+                <a:cs typeface="Arial"/>
+              </a:rPr>
+              <a:t>Busca em Largura - </a:t>
+            </a:r>
+            <a:r>
+              <a:rPr sz="2700" b="1" dirty="0" err="1">
+                <a:solidFill>
+                  <a:srgbClr val="17242B"/>
+                </a:solidFill>
+                <a:latin typeface="Arial"/>
+                <a:ea typeface="Arial"/>
+                <a:cs typeface="Arial"/>
+              </a:rPr>
+              <a:t>expansão</a:t>
+            </a:r>
+            <a:r>
+              <a:rPr sz="2700" b="1" dirty="0">
+                <a:solidFill>
+                  <a:srgbClr val="17242B"/>
+                </a:solidFill>
+                <a:latin typeface="Arial"/>
+                <a:ea typeface="Arial"/>
+                <a:cs typeface="Arial"/>
+              </a:rPr>
+              <a:t> </a:t>
+            </a:r>
+            <a:r>
+              <a:rPr sz="2700" b="1" dirty="0" err="1">
+                <a:solidFill>
+                  <a:srgbClr val="17242B"/>
+                </a:solidFill>
+                <a:latin typeface="Arial"/>
+                <a:ea typeface="Arial"/>
+                <a:cs typeface="Arial"/>
+              </a:rPr>
+              <a:t>por</a:t>
+            </a:r>
+            <a:r>
+              <a:rPr sz="2700" b="1" dirty="0">
+                <a:solidFill>
+                  <a:srgbClr val="17242B"/>
+                </a:solidFill>
+                <a:latin typeface="Arial"/>
+                <a:ea typeface="Arial"/>
+                <a:cs typeface="Arial"/>
+              </a:rPr>
+              <a:t> </a:t>
+            </a:r>
+            <a:r>
+              <a:rPr sz="2700" b="1" dirty="0" err="1">
+                <a:solidFill>
+                  <a:srgbClr val="17242B"/>
+                </a:solidFill>
+                <a:latin typeface="Arial"/>
+                <a:ea typeface="Arial"/>
+                <a:cs typeface="Arial"/>
+              </a:rPr>
+              <a:t>níveis</a:t>
+            </a:r>
+            <a:endParaRPr sz="2700" b="1" dirty="0">
+              <a:solidFill>
+                <a:srgbClr val="17242B"/>
+              </a:solidFill>
+              <a:latin typeface="Arial"/>
+              <a:ea typeface="Arial"/>
+              <a:cs typeface="Arial"/>
+            </a:endParaRPr>
           </a:p>
         </p:txBody>
       </p:sp>
@@ -13937,6 +14151,122 @@
       </p:sp>
       <p:sp>
         <p:nvSpPr>
+          <p:cNvPr id="47" name="Explicação 5.1">
+            <a:extLst>
+              <a:ext uri="{FF2B5EF4-FFF2-40B4-BE49-F238E27FC236}">
+                <a16:creationId xmlns:a16="http://schemas.microsoft.com/office/drawing/2014/main" id="{FEE94852-61F0-4F7E-8B8C-60652BDCC9A9}"/>
+              </a:ext>
+            </a:extLst>
+          </p:cNvPr>
+          <p:cNvSpPr>
+            <a:spLocks noGrp="1"/>
+          </p:cNvSpPr>
+          <p:nvPr/>
+        </p:nvSpPr>
+        <p:spPr>
+          <a:xfrm>
+            <a:off x="6096000" y="4495800"/>
+            <a:ext cx="5095875" cy="266700"/>
+          </a:xfrm>
+          <a:prstGeom prst="rect">
+            <a:avLst/>
+          </a:prstGeom>
+          <a:noFill/>
+          <a:ln w="0">
+            <a:noFill/>
+            <a:prstDash val="solid"/>
+          </a:ln>
+        </p:spPr>
+        <p:txBody>
+          <a:bodyPr wrap="square" lIns="0" tIns="0" rIns="0" bIns="0" anchor="ctr">
+            <a:normAutofit/>
+          </a:bodyPr>
+          <a:lstStyle/>
+          <a:p>
+            <a:pPr algn="l">
+              <a:defRPr sz="1650" b="0">
+                <a:solidFill>
+                  <a:srgbClr val="5E6A70"/>
+                </a:solidFill>
+                <a:latin typeface="Arial"/>
+                <a:ea typeface="Arial"/>
+                <a:cs typeface="Arial"/>
+              </a:defRPr>
+            </a:pPr>
+            <a:r>
+              <a:rPr sz="1650" b="0">
+                <a:solidFill>
+                  <a:srgbClr val="5E6A70"/>
+                </a:solidFill>
+                <a:latin typeface="Arial"/>
+                <a:ea typeface="Arial"/>
+                <a:cs typeface="Arial"/>
+              </a:rPr>
+              <a:t>A fila preserva a ordem de descoberta.</a:t>
+            </a:r>
+          </a:p>
+        </p:txBody>
+      </p:sp>
+      <p:sp>
+        <p:nvSpPr>
+          <p:cNvPr id="48" name="Explicação 5.2">
+            <a:extLst>
+              <a:ext uri="{FF2B5EF4-FFF2-40B4-BE49-F238E27FC236}">
+                <a16:creationId xmlns:a16="http://schemas.microsoft.com/office/drawing/2014/main" id="{A8757C09-221A-40C1-B701-60337748151B}"/>
+              </a:ext>
+            </a:extLst>
+          </p:cNvPr>
+          <p:cNvSpPr>
+            <a:spLocks noGrp="1"/>
+          </p:cNvSpPr>
+          <p:nvPr/>
+        </p:nvSpPr>
+        <p:spPr>
+          <a:xfrm>
+            <a:off x="6096000" y="4791075"/>
+            <a:ext cx="5095875" cy="266700"/>
+          </a:xfrm>
+          <a:prstGeom prst="rect">
+            <a:avLst/>
+          </a:prstGeom>
+          <a:noFill/>
+          <a:ln w="0">
+            <a:noFill/>
+            <a:prstDash val="solid"/>
+          </a:ln>
+        </p:spPr>
+        <p:txBody>
+          <a:bodyPr wrap="square" lIns="0" tIns="0" rIns="0" bIns="0" anchor="ctr">
+            <a:normAutofit/>
+          </a:bodyPr>
+          <a:lstStyle/>
+          <a:p>
+            <a:pPr algn="l">
+              <a:defRPr sz="1650" b="0">
+                <a:solidFill>
+                  <a:srgbClr val="5E6A70"/>
+                </a:solidFill>
+                <a:latin typeface="Arial"/>
+                <a:ea typeface="Arial"/>
+                <a:cs typeface="Arial"/>
+              </a:defRPr>
+            </a:pPr>
+            <a:r>
+              <a:rPr sz="1650" b="0">
+                <a:solidFill>
+                  <a:srgbClr val="5E6A70"/>
+                </a:solidFill>
+                <a:latin typeface="Arial"/>
+                <a:ea typeface="Arial"/>
+                <a:cs typeface="Arial"/>
+              </a:rPr>
+              <a:t>Por isso, explora as posições por níveis.</a:t>
+            </a:r>
+          </a:p>
+        </p:txBody>
+      </p:sp>
+      <p:sp>
+        <p:nvSpPr>
           <p:cNvPr id="45" name="Retângulo 44">
             <a:extLst>
               <a:ext uri="{FF2B5EF4-FFF2-40B4-BE49-F238E27FC236}">
@@ -13951,7 +14281,7 @@
         </p:nvSpPr>
         <p:spPr>
           <a:xfrm>
-            <a:off x="6096000" y="4981575"/>
+            <a:off x="6096000" y="5334000"/>
             <a:ext cx="4953000" cy="666750"/>
           </a:xfrm>
           <a:prstGeom prst="rect">
